--- a/환경경제학/2026-1/환경경제학_Chapter_04.pptx
+++ b/환경경제학/2026-1/환경경제학_Chapter_04.pptx
@@ -234,7 +234,7 @@
           <a:p>
             <a:fld id="{4A5E00EF-AEA4-43E2-9451-8F9C59A39471}" type="datetimeFigureOut">
               <a:rPr lang="ko-KR" altLang="en-US" smtClean="0"/>
-              <a:t>2026-09-16</a:t>
+              <a:t>2026-09-17</a:t>
             </a:fld>
             <a:endParaRPr lang="ko-KR" altLang="en-US"/>
           </a:p>
@@ -656,7 +656,7 @@
           <a:p>
             <a:fld id="{CD32C56F-BD27-4999-9E6D-D4EACE3DA9F4}" type="datetime1">
               <a:rPr lang="ko-KR" altLang="en-US" smtClean="0"/>
-              <a:t>2026-09-16</a:t>
+              <a:t>2026-09-17</a:t>
             </a:fld>
             <a:endParaRPr lang="ko-KR" altLang="en-US"/>
           </a:p>
@@ -870,7 +870,7 @@
           <a:p>
             <a:fld id="{8EF4A19C-72C8-45CA-8E3F-68A7FA345D6C}" type="datetime1">
               <a:rPr lang="ko-KR" altLang="en-US" smtClean="0"/>
-              <a:t>2026-09-16</a:t>
+              <a:t>2026-09-17</a:t>
             </a:fld>
             <a:endParaRPr lang="ko-KR" altLang="en-US"/>
           </a:p>
@@ -1094,7 +1094,7 @@
           <a:p>
             <a:fld id="{56A175B2-010B-4341-954C-5F8F5C70B124}" type="datetime1">
               <a:rPr lang="ko-KR" altLang="en-US" smtClean="0"/>
-              <a:t>2026-09-16</a:t>
+              <a:t>2026-09-17</a:t>
             </a:fld>
             <a:endParaRPr lang="ko-KR" altLang="en-US"/>
           </a:p>
@@ -1308,7 +1308,7 @@
           <a:p>
             <a:fld id="{16B83F9E-22C9-45CA-9E85-070F1D3EF530}" type="datetime1">
               <a:rPr lang="ko-KR" altLang="en-US" smtClean="0"/>
-              <a:t>2026-09-16</a:t>
+              <a:t>2026-09-17</a:t>
             </a:fld>
             <a:endParaRPr lang="ko-KR" altLang="en-US"/>
           </a:p>
@@ -1599,7 +1599,7 @@
           <a:p>
             <a:fld id="{03278F45-FB3C-4C4D-B89A-7BC3F5F229F6}" type="datetime1">
               <a:rPr lang="ko-KR" altLang="en-US" smtClean="0"/>
-              <a:t>2026-09-16</a:t>
+              <a:t>2026-09-17</a:t>
             </a:fld>
             <a:endParaRPr lang="ko-KR" altLang="en-US"/>
           </a:p>
@@ -1992,7 +1992,7 @@
           <a:p>
             <a:fld id="{38FDAC3C-35A6-415C-9F03-738A6AC328B1}" type="datetime1">
               <a:rPr lang="ko-KR" altLang="en-US" smtClean="0"/>
-              <a:t>2026-09-16</a:t>
+              <a:t>2026-09-17</a:t>
             </a:fld>
             <a:endParaRPr lang="ko-KR" altLang="en-US"/>
           </a:p>
@@ -3586,7 +3586,7 @@
           <a:p>
             <a:fld id="{507A0DF1-AEE6-4B0D-89D2-351E7B3EF65C}" type="datetime1">
               <a:rPr lang="ko-KR" altLang="en-US" smtClean="0"/>
-              <a:t>2026-09-16</a:t>
+              <a:t>2026-09-17</a:t>
             </a:fld>
             <a:endParaRPr lang="ko-KR" altLang="en-US"/>
           </a:p>
@@ -4014,7 +4014,7 @@
           <a:p>
             <a:fld id="{CA93B8C9-630F-4D57-944D-04FD37CECCD3}" type="datetime1">
               <a:rPr lang="ko-KR" altLang="en-US" smtClean="0"/>
-              <a:t>2026-09-16</a:t>
+              <a:t>2026-09-17</a:t>
             </a:fld>
             <a:endParaRPr lang="ko-KR" altLang="en-US"/>
           </a:p>
@@ -4171,7 +4171,7 @@
           <a:p>
             <a:fld id="{E986165A-AC43-4902-9541-874ECD310BA3}" type="datetime1">
               <a:rPr lang="ko-KR" altLang="en-US" smtClean="0"/>
-              <a:t>2026-09-16</a:t>
+              <a:t>2026-09-17</a:t>
             </a:fld>
             <a:endParaRPr lang="ko-KR" altLang="en-US"/>
           </a:p>
@@ -4498,7 +4498,7 @@
           <a:p>
             <a:fld id="{47E6EE6D-2B0E-43A9-87A2-7354CDB998F4}" type="datetime1">
               <a:rPr lang="ko-KR" altLang="en-US" smtClean="0"/>
-              <a:t>2026-09-16</a:t>
+              <a:t>2026-09-17</a:t>
             </a:fld>
             <a:endParaRPr lang="ko-KR" altLang="en-US"/>
           </a:p>
@@ -4802,7 +4802,7 @@
           <a:p>
             <a:fld id="{5CC5944E-0BC8-4FAA-9F94-6B4B05834E10}" type="datetime1">
               <a:rPr lang="ko-KR" altLang="en-US" smtClean="0"/>
-              <a:t>2026-09-16</a:t>
+              <a:t>2026-09-17</a:t>
             </a:fld>
             <a:endParaRPr lang="ko-KR" altLang="en-US"/>
           </a:p>
@@ -20899,8 +20899,8 @@
           </a:graphicData>
         </a:graphic>
       </p:graphicFrame>
-      <mc:AlternateContent xmlns:mc="http://schemas.openxmlformats.org/markup-compatibility/2006">
-        <mc:Choice xmlns:a14="http://schemas.microsoft.com/office/drawing/2010/main" Requires="a14">
+      <mc:AlternateContent xmlns:mc="http://schemas.openxmlformats.org/markup-compatibility/2006" xmlns:a14="http://schemas.microsoft.com/office/drawing/2010/main">
+        <mc:Choice Requires="a14">
           <p:sp>
             <p:nvSpPr>
               <p:cNvPr id="10" name="TextBox 9">
@@ -21476,7 +21476,7 @@
             </p:txBody>
           </p:sp>
         </mc:Choice>
-        <mc:Fallback>
+        <mc:Fallback xmlns="">
           <p:sp>
             <p:nvSpPr>
               <p:cNvPr id="10" name="TextBox 9">
